--- a/public/fun/cards/public/명함_공무원_14_스모키틸블루.pptx
+++ b/public/fun/cards/public/명함_공무원_14_스모키틸블루.pptx
@@ -3658,8 +3658,8 @@
         </p:nvSpPr>
         <p:spPr>
           <a:xfrm>
-            <a:off x="252000" y="424800"/>
-            <a:ext cx="540000" cy="237600"/>
+            <a:off x="252000" y="496800"/>
+            <a:ext cx="360000" cy="144000"/>
           </a:xfrm>
           <a:prstGeom prst="rect">
             <a:avLst/>
@@ -3674,11 +3674,11 @@
           <a:p>
             <a:pPr algn="l">
               <a:lnSpc>
-                <a:spcPts val="2175"/>
+                <a:spcPts val="927"/>
               </a:lnSpc>
             </a:pPr>
             <a:r>
-              <a:rPr sz="1500" b="1">
+              <a:rPr sz="640" b="1" spc="120">
                 <a:solidFill>
                   <a:srgbClr val="BC6452"/>
                 </a:solidFill>
@@ -3698,8 +3698,8 @@
         </p:nvSpPr>
         <p:spPr>
           <a:xfrm>
-            <a:off x="720000" y="475200"/>
-            <a:ext cx="1512000" cy="180000"/>
+            <a:off x="576000" y="475200"/>
+            <a:ext cx="1656000" cy="180000"/>
           </a:xfrm>
           <a:prstGeom prst="rect">
             <a:avLst/>
@@ -3738,8 +3738,8 @@
         </p:nvSpPr>
         <p:spPr>
           <a:xfrm>
-            <a:off x="252000" y="691200"/>
-            <a:ext cx="540000" cy="237600"/>
+            <a:off x="252000" y="763200"/>
+            <a:ext cx="360000" cy="144000"/>
           </a:xfrm>
           <a:prstGeom prst="rect">
             <a:avLst/>
@@ -3754,11 +3754,11 @@
           <a:p>
             <a:pPr algn="l">
               <a:lnSpc>
-                <a:spcPts val="2175"/>
+                <a:spcPts val="927"/>
               </a:lnSpc>
             </a:pPr>
             <a:r>
-              <a:rPr sz="1500" b="1">
+              <a:rPr sz="640" b="1" spc="120">
                 <a:solidFill>
                   <a:srgbClr val="BC6452"/>
                 </a:solidFill>
@@ -3778,8 +3778,8 @@
         </p:nvSpPr>
         <p:spPr>
           <a:xfrm>
-            <a:off x="720000" y="741600"/>
-            <a:ext cx="1512000" cy="180000"/>
+            <a:off x="576000" y="741600"/>
+            <a:ext cx="1656000" cy="180000"/>
           </a:xfrm>
           <a:prstGeom prst="rect">
             <a:avLst/>
@@ -3818,8 +3818,8 @@
         </p:nvSpPr>
         <p:spPr>
           <a:xfrm>
-            <a:off x="252000" y="957600"/>
-            <a:ext cx="540000" cy="237600"/>
+            <a:off x="252000" y="1029600"/>
+            <a:ext cx="360000" cy="144000"/>
           </a:xfrm>
           <a:prstGeom prst="rect">
             <a:avLst/>
@@ -3834,11 +3834,11 @@
           <a:p>
             <a:pPr algn="l">
               <a:lnSpc>
-                <a:spcPts val="2175"/>
+                <a:spcPts val="927"/>
               </a:lnSpc>
             </a:pPr>
             <a:r>
-              <a:rPr sz="1500" b="1">
+              <a:rPr sz="640" b="1" spc="120">
                 <a:solidFill>
                   <a:srgbClr val="BC6452"/>
                 </a:solidFill>
@@ -3858,8 +3858,8 @@
         </p:nvSpPr>
         <p:spPr>
           <a:xfrm>
-            <a:off x="720000" y="1008000"/>
-            <a:ext cx="1512000" cy="180000"/>
+            <a:off x="576000" y="1008000"/>
+            <a:ext cx="1656000" cy="180000"/>
           </a:xfrm>
           <a:prstGeom prst="rect">
             <a:avLst/>
@@ -3898,8 +3898,8 @@
         </p:nvSpPr>
         <p:spPr>
           <a:xfrm>
-            <a:off x="252000" y="1224000"/>
-            <a:ext cx="540000" cy="237600"/>
+            <a:off x="252000" y="1296000"/>
+            <a:ext cx="360000" cy="144000"/>
           </a:xfrm>
           <a:prstGeom prst="rect">
             <a:avLst/>
@@ -3914,11 +3914,11 @@
           <a:p>
             <a:pPr algn="l">
               <a:lnSpc>
-                <a:spcPts val="2175"/>
+                <a:spcPts val="927"/>
               </a:lnSpc>
             </a:pPr>
             <a:r>
-              <a:rPr sz="1500" b="1">
+              <a:rPr sz="640" b="1" spc="120">
                 <a:solidFill>
                   <a:srgbClr val="BC6452"/>
                 </a:solidFill>
@@ -3938,8 +3938,8 @@
         </p:nvSpPr>
         <p:spPr>
           <a:xfrm>
-            <a:off x="720000" y="1274400"/>
-            <a:ext cx="1512000" cy="180000"/>
+            <a:off x="576000" y="1274400"/>
+            <a:ext cx="1656000" cy="180000"/>
           </a:xfrm>
           <a:prstGeom prst="rect">
             <a:avLst/>
